--- a/Week-6.pptx
+++ b/Week-6.pptx
@@ -24,6 +24,7 @@
     <p:sldId id="273" r:id="rId18"/>
     <p:sldId id="272" r:id="rId19"/>
     <p:sldId id="274" r:id="rId20"/>
+    <p:sldId id="275" r:id="rId21"/>
   </p:sldIdLst>
   <p:sldSz cx="12192000" cy="6858000"/>
   <p:notesSz cx="6858000" cy="9144000"/>
@@ -3972,6 +3973,92 @@
 </p:sld>
 </file>
 
+<file path=ppt/slides/slide20.xml><?xml version="1.0" encoding="utf-8"?>
+<p:sld xmlns:a="http://schemas.openxmlformats.org/drawingml/2006/main" xmlns:r="http://schemas.openxmlformats.org/officeDocument/2006/relationships" xmlns:p="http://schemas.openxmlformats.org/presentationml/2006/main">
+  <p:cSld>
+    <p:spTree>
+      <p:nvGrpSpPr>
+        <p:cNvPr id="1" name=""/>
+        <p:cNvGrpSpPr/>
+        <p:nvPr/>
+      </p:nvGrpSpPr>
+      <p:grpSpPr>
+        <a:xfrm>
+          <a:off x="0" y="0"/>
+          <a:ext cx="0" cy="0"/>
+          <a:chOff x="0" y="0"/>
+          <a:chExt cx="0" cy="0"/>
+        </a:xfrm>
+      </p:grpSpPr>
+      <p:sp>
+        <p:nvSpPr>
+          <p:cNvPr id="2" name="Title 1"/>
+          <p:cNvSpPr>
+            <a:spLocks noGrp="1"/>
+          </p:cNvSpPr>
+          <p:nvPr>
+            <p:ph type="title"/>
+          </p:nvPr>
+        </p:nvSpPr>
+        <p:spPr/>
+        <p:txBody>
+          <a:bodyPr/>
+          <a:lstStyle/>
+          <a:p>
+            <a:r>
+              <a:rPr lang="en-US" dirty="0" smtClean="0"/>
+              <a:t>Finally pushing all code to </a:t>
+            </a:r>
+            <a:r>
+              <a:rPr lang="en-US" dirty="0" err="1" smtClean="0"/>
+              <a:t>GitHub</a:t>
+            </a:r>
+            <a:endParaRPr lang="en-US" dirty="0"/>
+          </a:p>
+        </p:txBody>
+      </p:sp>
+      <p:pic>
+        <p:nvPicPr>
+          <p:cNvPr id="4" name="Content Placeholder 3"/>
+          <p:cNvPicPr>
+            <a:picLocks noGrp="1" noChangeAspect="1"/>
+          </p:cNvPicPr>
+          <p:nvPr>
+            <p:ph idx="1"/>
+          </p:nvPr>
+        </p:nvPicPr>
+        <p:blipFill>
+          <a:blip r:embed="rId2" cstate="print">
+            <a:extLst>
+              <a:ext uri="{28A0092B-C50C-407E-A947-70E740481C1C}">
+                <a14:useLocalDpi xmlns:a14="http://schemas.microsoft.com/office/drawing/2010/main" val="0"/>
+              </a:ext>
+            </a:extLst>
+          </a:blip>
+          <a:stretch>
+            <a:fillRect/>
+          </a:stretch>
+        </p:blipFill>
+        <p:spPr>
+          <a:xfrm>
+            <a:off x="2228144" y="1825625"/>
+            <a:ext cx="7735712" cy="4351338"/>
+          </a:xfrm>
+        </p:spPr>
+      </p:pic>
+    </p:spTree>
+    <p:extLst>
+      <p:ext uri="{BB962C8B-B14F-4D97-AF65-F5344CB8AC3E}">
+        <p14:creationId xmlns:p14="http://schemas.microsoft.com/office/powerpoint/2010/main" val="745463705"/>
+      </p:ext>
+    </p:extLst>
+  </p:cSld>
+  <p:clrMapOvr>
+    <a:masterClrMapping/>
+  </p:clrMapOvr>
+</p:sld>
+</file>
+
 <file path=ppt/slides/slide3.xml><?xml version="1.0" encoding="utf-8"?>
 <p:sld xmlns:a="http://schemas.openxmlformats.org/drawingml/2006/main" xmlns:r="http://schemas.openxmlformats.org/officeDocument/2006/relationships" xmlns:p="http://schemas.openxmlformats.org/presentationml/2006/main">
   <p:cSld>

--- a/Week-6.pptx
+++ b/Week-6.pptx
@@ -5,26 +5,27 @@
     <p:sldMasterId id="2147483648" r:id="rId1"/>
   </p:sldMasterIdLst>
   <p:sldIdLst>
-    <p:sldId id="256" r:id="rId2"/>
-    <p:sldId id="257" r:id="rId3"/>
-    <p:sldId id="258" r:id="rId4"/>
-    <p:sldId id="259" r:id="rId5"/>
-    <p:sldId id="260" r:id="rId6"/>
-    <p:sldId id="261" r:id="rId7"/>
-    <p:sldId id="262" r:id="rId8"/>
-    <p:sldId id="263" r:id="rId9"/>
-    <p:sldId id="264" r:id="rId10"/>
-    <p:sldId id="265" r:id="rId11"/>
-    <p:sldId id="266" r:id="rId12"/>
-    <p:sldId id="267" r:id="rId13"/>
-    <p:sldId id="268" r:id="rId14"/>
-    <p:sldId id="269" r:id="rId15"/>
-    <p:sldId id="270" r:id="rId16"/>
-    <p:sldId id="271" r:id="rId17"/>
-    <p:sldId id="273" r:id="rId18"/>
-    <p:sldId id="272" r:id="rId19"/>
-    <p:sldId id="274" r:id="rId20"/>
-    <p:sldId id="275" r:id="rId21"/>
+    <p:sldId id="276" r:id="rId2"/>
+    <p:sldId id="256" r:id="rId3"/>
+    <p:sldId id="257" r:id="rId4"/>
+    <p:sldId id="258" r:id="rId5"/>
+    <p:sldId id="259" r:id="rId6"/>
+    <p:sldId id="260" r:id="rId7"/>
+    <p:sldId id="261" r:id="rId8"/>
+    <p:sldId id="262" r:id="rId9"/>
+    <p:sldId id="263" r:id="rId10"/>
+    <p:sldId id="264" r:id="rId11"/>
+    <p:sldId id="265" r:id="rId12"/>
+    <p:sldId id="266" r:id="rId13"/>
+    <p:sldId id="267" r:id="rId14"/>
+    <p:sldId id="268" r:id="rId15"/>
+    <p:sldId id="269" r:id="rId16"/>
+    <p:sldId id="270" r:id="rId17"/>
+    <p:sldId id="271" r:id="rId18"/>
+    <p:sldId id="273" r:id="rId19"/>
+    <p:sldId id="272" r:id="rId20"/>
+    <p:sldId id="274" r:id="rId21"/>
+    <p:sldId id="275" r:id="rId22"/>
   </p:sldIdLst>
   <p:sldSz cx="12192000" cy="6858000"/>
   <p:notesSz cx="6858000" cy="9144000"/>
@@ -123,6 +124,11 @@
       </a:defRPr>
     </a:lvl9pPr>
   </p:defaultTextStyle>
+  <p:extLst>
+    <p:ext uri="{EFAFB233-063F-42B5-8137-9DF3F51BA10A}">
+      <p15:sldGuideLst xmlns:p15="http://schemas.microsoft.com/office/powerpoint/2012/main"/>
+    </p:ext>
+  </p:extLst>
 </p:presentation>
 </file>
 
@@ -3000,7 +3006,15 @@
           <a:p>
             <a:r>
               <a:rPr lang="en-US" dirty="0" smtClean="0"/>
-              <a:t>Week-6</a:t>
+              <a:t>Student </a:t>
+            </a:r>
+            <a:r>
+              <a:rPr lang="en-US" dirty="0" err="1" smtClean="0"/>
+              <a:t>Name:D.Jeevan</a:t>
+            </a:r>
+            <a:r>
+              <a:rPr lang="en-US" dirty="0" smtClean="0"/>
+              <a:t> Eshwar</a:t>
             </a:r>
             <a:endParaRPr lang="en-US" dirty="0"/>
           </a:p>
@@ -3022,31 +3036,16 @@
           <a:lstStyle/>
           <a:p>
             <a:r>
-              <a:rPr lang="en-US" dirty="0" err="1"/>
-              <a:t>Git</a:t>
-            </a:r>
-            <a:r>
               <a:rPr lang="en-US" dirty="0"/>
-              <a:t>, </a:t>
-            </a:r>
-            <a:r>
-              <a:rPr lang="en-US" dirty="0" err="1"/>
-              <a:t>GitHub</a:t>
-            </a:r>
-            <a:r>
-              <a:rPr lang="en-US" dirty="0"/>
-              <a:t> &amp; Final Project</a:t>
-            </a:r>
-          </a:p>
-          <a:p>
-            <a:endParaRPr lang="en-US" dirty="0"/>
+              <a:t>https://internnova.co.in/</a:t>
+            </a:r>
           </a:p>
         </p:txBody>
       </p:sp>
     </p:spTree>
     <p:extLst>
       <p:ext uri="{BB962C8B-B14F-4D97-AF65-F5344CB8AC3E}">
-        <p14:creationId xmlns:p14="http://schemas.microsoft.com/office/powerpoint/2010/main" val="3376409850"/>
+        <p14:creationId xmlns:p14="http://schemas.microsoft.com/office/powerpoint/2010/main" val="611176317"/>
       </p:ext>
     </p:extLst>
   </p:cSld>
@@ -3090,6 +3089,96 @@
           <a:p>
             <a:r>
               <a:rPr lang="en-US" dirty="0" smtClean="0"/>
+              <a:t>Added README.md to </a:t>
+            </a:r>
+            <a:r>
+              <a:rPr lang="en-US" dirty="0" err="1" smtClean="0"/>
+              <a:t>Git</a:t>
+            </a:r>
+            <a:r>
+              <a:rPr lang="en-US" dirty="0" smtClean="0"/>
+              <a:t> repo</a:t>
+            </a:r>
+            <a:endParaRPr lang="en-US" dirty="0"/>
+          </a:p>
+        </p:txBody>
+      </p:sp>
+      <p:pic>
+        <p:nvPicPr>
+          <p:cNvPr id="4" name="Content Placeholder 3"/>
+          <p:cNvPicPr>
+            <a:picLocks noGrp="1" noChangeAspect="1"/>
+          </p:cNvPicPr>
+          <p:nvPr>
+            <p:ph idx="1"/>
+          </p:nvPr>
+        </p:nvPicPr>
+        <p:blipFill>
+          <a:blip r:embed="rId2" cstate="print">
+            <a:extLst>
+              <a:ext uri="{28A0092B-C50C-407E-A947-70E740481C1C}">
+                <a14:useLocalDpi xmlns:a14="http://schemas.microsoft.com/office/drawing/2010/main" val="0"/>
+              </a:ext>
+            </a:extLst>
+          </a:blip>
+          <a:stretch>
+            <a:fillRect/>
+          </a:stretch>
+        </p:blipFill>
+        <p:spPr>
+          <a:xfrm>
+            <a:off x="2228144" y="1825625"/>
+            <a:ext cx="7735712" cy="4351338"/>
+          </a:xfrm>
+        </p:spPr>
+      </p:pic>
+    </p:spTree>
+    <p:extLst>
+      <p:ext uri="{BB962C8B-B14F-4D97-AF65-F5344CB8AC3E}">
+        <p14:creationId xmlns:p14="http://schemas.microsoft.com/office/powerpoint/2010/main" val="2766168490"/>
+      </p:ext>
+    </p:extLst>
+  </p:cSld>
+  <p:clrMapOvr>
+    <a:masterClrMapping/>
+  </p:clrMapOvr>
+</p:sld>
+</file>
+
+<file path=ppt/slides/slide11.xml><?xml version="1.0" encoding="utf-8"?>
+<p:sld xmlns:a="http://schemas.openxmlformats.org/drawingml/2006/main" xmlns:r="http://schemas.openxmlformats.org/officeDocument/2006/relationships" xmlns:p="http://schemas.openxmlformats.org/presentationml/2006/main">
+  <p:cSld>
+    <p:spTree>
+      <p:nvGrpSpPr>
+        <p:cNvPr id="1" name=""/>
+        <p:cNvGrpSpPr/>
+        <p:nvPr/>
+      </p:nvGrpSpPr>
+      <p:grpSpPr>
+        <a:xfrm>
+          <a:off x="0" y="0"/>
+          <a:ext cx="0" cy="0"/>
+          <a:chOff x="0" y="0"/>
+          <a:chExt cx="0" cy="0"/>
+        </a:xfrm>
+      </p:grpSpPr>
+      <p:sp>
+        <p:nvSpPr>
+          <p:cNvPr id="2" name="Title 1"/>
+          <p:cNvSpPr>
+            <a:spLocks noGrp="1"/>
+          </p:cNvSpPr>
+          <p:nvPr>
+            <p:ph type="title"/>
+          </p:nvPr>
+        </p:nvSpPr>
+        <p:spPr/>
+        <p:txBody>
+          <a:bodyPr/>
+          <a:lstStyle/>
+          <a:p>
+            <a:r>
+              <a:rPr lang="en-US" dirty="0" smtClean="0"/>
               <a:t>Creation of </a:t>
             </a:r>
             <a:r>
@@ -3098,11 +3187,7 @@
             </a:r>
             <a:r>
               <a:rPr lang="en-US" dirty="0" smtClean="0"/>
-              <a:t> </a:t>
-            </a:r>
-            <a:r>
-              <a:rPr lang="en-US" dirty="0" smtClean="0"/>
-              <a:t>repository </a:t>
+              <a:t> repository </a:t>
             </a:r>
             <a:endParaRPr lang="en-US" dirty="0"/>
           </a:p>
@@ -3150,7 +3235,7 @@
 </p:sld>
 </file>
 
-<file path=ppt/slides/slide11.xml><?xml version="1.0" encoding="utf-8"?>
+<file path=ppt/slides/slide12.xml><?xml version="1.0" encoding="utf-8"?>
 <p:sld xmlns:a="http://schemas.openxmlformats.org/drawingml/2006/main" xmlns:r="http://schemas.openxmlformats.org/officeDocument/2006/relationships" xmlns:p="http://schemas.openxmlformats.org/presentationml/2006/main">
   <p:cSld>
     <p:spTree>
@@ -3232,7 +3317,7 @@
 </p:sld>
 </file>
 
-<file path=ppt/slides/slide12.xml><?xml version="1.0" encoding="utf-8"?>
+<file path=ppt/slides/slide13.xml><?xml version="1.0" encoding="utf-8"?>
 <p:sld xmlns:a="http://schemas.openxmlformats.org/drawingml/2006/main" xmlns:r="http://schemas.openxmlformats.org/officeDocument/2006/relationships" xmlns:p="http://schemas.openxmlformats.org/presentationml/2006/main">
   <p:cSld>
     <p:spTree>
@@ -3314,7 +3399,7 @@
 </p:sld>
 </file>
 
-<file path=ppt/slides/slide13.xml><?xml version="1.0" encoding="utf-8"?>
+<file path=ppt/slides/slide14.xml><?xml version="1.0" encoding="utf-8"?>
 <p:sld xmlns:a="http://schemas.openxmlformats.org/drawingml/2006/main" xmlns:r="http://schemas.openxmlformats.org/officeDocument/2006/relationships" xmlns:p="http://schemas.openxmlformats.org/presentationml/2006/main">
   <p:cSld>
     <p:spTree>
@@ -3396,7 +3481,7 @@
 </p:sld>
 </file>
 
-<file path=ppt/slides/slide14.xml><?xml version="1.0" encoding="utf-8"?>
+<file path=ppt/slides/slide15.xml><?xml version="1.0" encoding="utf-8"?>
 <p:sld xmlns:a="http://schemas.openxmlformats.org/drawingml/2006/main" xmlns:r="http://schemas.openxmlformats.org/officeDocument/2006/relationships" xmlns:p="http://schemas.openxmlformats.org/presentationml/2006/main">
   <p:cSld>
     <p:spTree>
@@ -3478,7 +3563,7 @@
 </p:sld>
 </file>
 
-<file path=ppt/slides/slide15.xml><?xml version="1.0" encoding="utf-8"?>
+<file path=ppt/slides/slide16.xml><?xml version="1.0" encoding="utf-8"?>
 <p:sld xmlns:a="http://schemas.openxmlformats.org/drawingml/2006/main" xmlns:r="http://schemas.openxmlformats.org/officeDocument/2006/relationships" xmlns:p="http://schemas.openxmlformats.org/presentationml/2006/main">
   <p:cSld>
     <p:spTree>
@@ -3560,7 +3645,7 @@
 </p:sld>
 </file>
 
-<file path=ppt/slides/slide16.xml><?xml version="1.0" encoding="utf-8"?>
+<file path=ppt/slides/slide17.xml><?xml version="1.0" encoding="utf-8"?>
 <p:sld xmlns:a="http://schemas.openxmlformats.org/drawingml/2006/main" xmlns:r="http://schemas.openxmlformats.org/officeDocument/2006/relationships" xmlns:p="http://schemas.openxmlformats.org/presentationml/2006/main">
   <p:cSld>
     <p:spTree>
@@ -3639,7 +3724,7 @@
 </p:sld>
 </file>
 
-<file path=ppt/slides/slide17.xml><?xml version="1.0" encoding="utf-8"?>
+<file path=ppt/slides/slide18.xml><?xml version="1.0" encoding="utf-8"?>
 <p:sld xmlns:a="http://schemas.openxmlformats.org/drawingml/2006/main" xmlns:r="http://schemas.openxmlformats.org/officeDocument/2006/relationships" xmlns:p="http://schemas.openxmlformats.org/presentationml/2006/main">
   <p:cSld>
     <p:spTree>
@@ -3718,7 +3803,7 @@
 </p:sld>
 </file>
 
-<file path=ppt/slides/slide18.xml><?xml version="1.0" encoding="utf-8"?>
+<file path=ppt/slides/slide19.xml><?xml version="1.0" encoding="utf-8"?>
 <p:sld xmlns:a="http://schemas.openxmlformats.org/drawingml/2006/main" xmlns:r="http://schemas.openxmlformats.org/officeDocument/2006/relationships" xmlns:p="http://schemas.openxmlformats.org/presentationml/2006/main">
   <p:cSld>
     <p:spTree>
@@ -3797,7 +3882,97 @@
 </p:sld>
 </file>
 
-<file path=ppt/slides/slide19.xml><?xml version="1.0" encoding="utf-8"?>
+<file path=ppt/slides/slide2.xml><?xml version="1.0" encoding="utf-8"?>
+<p:sld xmlns:a="http://schemas.openxmlformats.org/drawingml/2006/main" xmlns:r="http://schemas.openxmlformats.org/officeDocument/2006/relationships" xmlns:p="http://schemas.openxmlformats.org/presentationml/2006/main">
+  <p:cSld>
+    <p:spTree>
+      <p:nvGrpSpPr>
+        <p:cNvPr id="1" name=""/>
+        <p:cNvGrpSpPr/>
+        <p:nvPr/>
+      </p:nvGrpSpPr>
+      <p:grpSpPr>
+        <a:xfrm>
+          <a:off x="0" y="0"/>
+          <a:ext cx="0" cy="0"/>
+          <a:chOff x="0" y="0"/>
+          <a:chExt cx="0" cy="0"/>
+        </a:xfrm>
+      </p:grpSpPr>
+      <p:sp>
+        <p:nvSpPr>
+          <p:cNvPr id="2" name="Title 1"/>
+          <p:cNvSpPr>
+            <a:spLocks noGrp="1"/>
+          </p:cNvSpPr>
+          <p:nvPr>
+            <p:ph type="ctrTitle"/>
+          </p:nvPr>
+        </p:nvSpPr>
+        <p:spPr/>
+        <p:txBody>
+          <a:bodyPr/>
+          <a:lstStyle/>
+          <a:p>
+            <a:r>
+              <a:rPr lang="en-US" dirty="0" smtClean="0"/>
+              <a:t>Week-6</a:t>
+            </a:r>
+            <a:endParaRPr lang="en-US" dirty="0"/>
+          </a:p>
+        </p:txBody>
+      </p:sp>
+      <p:sp>
+        <p:nvSpPr>
+          <p:cNvPr id="3" name="Subtitle 2"/>
+          <p:cNvSpPr>
+            <a:spLocks noGrp="1"/>
+          </p:cNvSpPr>
+          <p:nvPr>
+            <p:ph type="subTitle" idx="1"/>
+          </p:nvPr>
+        </p:nvSpPr>
+        <p:spPr/>
+        <p:txBody>
+          <a:bodyPr/>
+          <a:lstStyle/>
+          <a:p>
+            <a:r>
+              <a:rPr lang="en-US" dirty="0" err="1"/>
+              <a:t>Git</a:t>
+            </a:r>
+            <a:r>
+              <a:rPr lang="en-US" dirty="0"/>
+              <a:t>, </a:t>
+            </a:r>
+            <a:r>
+              <a:rPr lang="en-US" dirty="0" err="1"/>
+              <a:t>GitHub</a:t>
+            </a:r>
+            <a:r>
+              <a:rPr lang="en-US" dirty="0"/>
+              <a:t> &amp; Final Project</a:t>
+            </a:r>
+          </a:p>
+          <a:p>
+            <a:endParaRPr lang="en-US" dirty="0"/>
+          </a:p>
+        </p:txBody>
+      </p:sp>
+    </p:spTree>
+    <p:extLst>
+      <p:ext uri="{BB962C8B-B14F-4D97-AF65-F5344CB8AC3E}">
+        <p14:creationId xmlns:p14="http://schemas.microsoft.com/office/powerpoint/2010/main" val="3376409850"/>
+      </p:ext>
+    </p:extLst>
+  </p:cSld>
+  <p:clrMapOvr>
+    <a:masterClrMapping/>
+  </p:clrMapOvr>
+</p:sld>
+</file>
+
+<file path=ppt/slides/slide20.xml><?xml version="1.0" encoding="utf-8"?>
 <p:sld xmlns:a="http://schemas.openxmlformats.org/drawingml/2006/main" xmlns:r="http://schemas.openxmlformats.org/officeDocument/2006/relationships" xmlns:p="http://schemas.openxmlformats.org/presentationml/2006/main">
   <p:cSld>
     <p:spTree>
@@ -3887,93 +4062,7 @@
 </p:sld>
 </file>
 
-<file path=ppt/slides/slide2.xml><?xml version="1.0" encoding="utf-8"?>
-<p:sld xmlns:a="http://schemas.openxmlformats.org/drawingml/2006/main" xmlns:r="http://schemas.openxmlformats.org/officeDocument/2006/relationships" xmlns:p="http://schemas.openxmlformats.org/presentationml/2006/main">
-  <p:cSld>
-    <p:spTree>
-      <p:nvGrpSpPr>
-        <p:cNvPr id="1" name=""/>
-        <p:cNvGrpSpPr/>
-        <p:nvPr/>
-      </p:nvGrpSpPr>
-      <p:grpSpPr>
-        <a:xfrm>
-          <a:off x="0" y="0"/>
-          <a:ext cx="0" cy="0"/>
-          <a:chOff x="0" y="0"/>
-          <a:chExt cx="0" cy="0"/>
-        </a:xfrm>
-      </p:grpSpPr>
-      <p:sp>
-        <p:nvSpPr>
-          <p:cNvPr id="2" name="Title 1"/>
-          <p:cNvSpPr>
-            <a:spLocks noGrp="1"/>
-          </p:cNvSpPr>
-          <p:nvPr>
-            <p:ph type="title"/>
-          </p:nvPr>
-        </p:nvSpPr>
-        <p:spPr/>
-        <p:txBody>
-          <a:bodyPr/>
-          <a:lstStyle/>
-          <a:p>
-            <a:r>
-              <a:rPr lang="en-US" dirty="0" err="1" smtClean="0"/>
-              <a:t>Git</a:t>
-            </a:r>
-            <a:r>
-              <a:rPr lang="en-US" dirty="0" smtClean="0"/>
-              <a:t> installation and version used</a:t>
-            </a:r>
-            <a:endParaRPr lang="en-US" dirty="0"/>
-          </a:p>
-        </p:txBody>
-      </p:sp>
-      <p:pic>
-        <p:nvPicPr>
-          <p:cNvPr id="4" name="Content Placeholder 3"/>
-          <p:cNvPicPr>
-            <a:picLocks noGrp="1" noChangeAspect="1"/>
-          </p:cNvPicPr>
-          <p:nvPr>
-            <p:ph idx="1"/>
-          </p:nvPr>
-        </p:nvPicPr>
-        <p:blipFill>
-          <a:blip r:embed="rId2" cstate="print">
-            <a:extLst>
-              <a:ext uri="{28A0092B-C50C-407E-A947-70E740481C1C}">
-                <a14:useLocalDpi xmlns:a14="http://schemas.microsoft.com/office/drawing/2010/main" val="0"/>
-              </a:ext>
-            </a:extLst>
-          </a:blip>
-          <a:stretch>
-            <a:fillRect/>
-          </a:stretch>
-        </p:blipFill>
-        <p:spPr>
-          <a:xfrm>
-            <a:off x="2228144" y="1825625"/>
-            <a:ext cx="7735712" cy="4351338"/>
-          </a:xfrm>
-        </p:spPr>
-      </p:pic>
-    </p:spTree>
-    <p:extLst>
-      <p:ext uri="{BB962C8B-B14F-4D97-AF65-F5344CB8AC3E}">
-        <p14:creationId xmlns:p14="http://schemas.microsoft.com/office/powerpoint/2010/main" val="2702078121"/>
-      </p:ext>
-    </p:extLst>
-  </p:cSld>
-  <p:clrMapOvr>
-    <a:masterClrMapping/>
-  </p:clrMapOvr>
-</p:sld>
-</file>
-
-<file path=ppt/slides/slide20.xml><?xml version="1.0" encoding="utf-8"?>
+<file path=ppt/slides/slide21.xml><?xml version="1.0" encoding="utf-8"?>
 <p:sld xmlns:a="http://schemas.openxmlformats.org/drawingml/2006/main" xmlns:r="http://schemas.openxmlformats.org/officeDocument/2006/relationships" xmlns:p="http://schemas.openxmlformats.org/presentationml/2006/main">
   <p:cSld>
     <p:spTree>
@@ -4093,6 +4182,92 @@
           <a:p>
             <a:r>
               <a:rPr lang="en-US" dirty="0" err="1" smtClean="0"/>
+              <a:t>Git</a:t>
+            </a:r>
+            <a:r>
+              <a:rPr lang="en-US" dirty="0" smtClean="0"/>
+              <a:t> installation and version used</a:t>
+            </a:r>
+            <a:endParaRPr lang="en-US" dirty="0"/>
+          </a:p>
+        </p:txBody>
+      </p:sp>
+      <p:pic>
+        <p:nvPicPr>
+          <p:cNvPr id="4" name="Content Placeholder 3"/>
+          <p:cNvPicPr>
+            <a:picLocks noGrp="1" noChangeAspect="1"/>
+          </p:cNvPicPr>
+          <p:nvPr>
+            <p:ph idx="1"/>
+          </p:nvPr>
+        </p:nvPicPr>
+        <p:blipFill>
+          <a:blip r:embed="rId2" cstate="print">
+            <a:extLst>
+              <a:ext uri="{28A0092B-C50C-407E-A947-70E740481C1C}">
+                <a14:useLocalDpi xmlns:a14="http://schemas.microsoft.com/office/drawing/2010/main" val="0"/>
+              </a:ext>
+            </a:extLst>
+          </a:blip>
+          <a:stretch>
+            <a:fillRect/>
+          </a:stretch>
+        </p:blipFill>
+        <p:spPr>
+          <a:xfrm>
+            <a:off x="2228144" y="1825625"/>
+            <a:ext cx="7735712" cy="4351338"/>
+          </a:xfrm>
+        </p:spPr>
+      </p:pic>
+    </p:spTree>
+    <p:extLst>
+      <p:ext uri="{BB962C8B-B14F-4D97-AF65-F5344CB8AC3E}">
+        <p14:creationId xmlns:p14="http://schemas.microsoft.com/office/powerpoint/2010/main" val="2702078121"/>
+      </p:ext>
+    </p:extLst>
+  </p:cSld>
+  <p:clrMapOvr>
+    <a:masterClrMapping/>
+  </p:clrMapOvr>
+</p:sld>
+</file>
+
+<file path=ppt/slides/slide4.xml><?xml version="1.0" encoding="utf-8"?>
+<p:sld xmlns:a="http://schemas.openxmlformats.org/drawingml/2006/main" xmlns:r="http://schemas.openxmlformats.org/officeDocument/2006/relationships" xmlns:p="http://schemas.openxmlformats.org/presentationml/2006/main">
+  <p:cSld>
+    <p:spTree>
+      <p:nvGrpSpPr>
+        <p:cNvPr id="1" name=""/>
+        <p:cNvGrpSpPr/>
+        <p:nvPr/>
+      </p:nvGrpSpPr>
+      <p:grpSpPr>
+        <a:xfrm>
+          <a:off x="0" y="0"/>
+          <a:ext cx="0" cy="0"/>
+          <a:chOff x="0" y="0"/>
+          <a:chExt cx="0" cy="0"/>
+        </a:xfrm>
+      </p:grpSpPr>
+      <p:sp>
+        <p:nvSpPr>
+          <p:cNvPr id="2" name="Title 1"/>
+          <p:cNvSpPr>
+            <a:spLocks noGrp="1"/>
+          </p:cNvSpPr>
+          <p:nvPr>
+            <p:ph type="title"/>
+          </p:nvPr>
+        </p:nvSpPr>
+        <p:spPr/>
+        <p:txBody>
+          <a:bodyPr/>
+          <a:lstStyle/>
+          <a:p>
+            <a:r>
+              <a:rPr lang="en-US" dirty="0" err="1" smtClean="0"/>
               <a:t>GitHub</a:t>
             </a:r>
             <a:r>
@@ -4145,7 +4320,7 @@
 </p:sld>
 </file>
 
-<file path=ppt/slides/slide4.xml><?xml version="1.0" encoding="utf-8"?>
+<file path=ppt/slides/slide5.xml><?xml version="1.0" encoding="utf-8"?>
 <p:sld xmlns:a="http://schemas.openxmlformats.org/drawingml/2006/main" xmlns:r="http://schemas.openxmlformats.org/officeDocument/2006/relationships" xmlns:p="http://schemas.openxmlformats.org/presentationml/2006/main">
   <p:cSld>
     <p:spTree>
@@ -4231,7 +4406,7 @@
 </p:sld>
 </file>
 
-<file path=ppt/slides/slide5.xml><?xml version="1.0" encoding="utf-8"?>
+<file path=ppt/slides/slide6.xml><?xml version="1.0" encoding="utf-8"?>
 <p:sld xmlns:a="http://schemas.openxmlformats.org/drawingml/2006/main" xmlns:r="http://schemas.openxmlformats.org/officeDocument/2006/relationships" xmlns:p="http://schemas.openxmlformats.org/presentationml/2006/main">
   <p:cSld>
     <p:spTree>
@@ -4321,7 +4496,7 @@
 </p:sld>
 </file>
 
-<file path=ppt/slides/slide6.xml><?xml version="1.0" encoding="utf-8"?>
+<file path=ppt/slides/slide7.xml><?xml version="1.0" encoding="utf-8"?>
 <p:sld xmlns:a="http://schemas.openxmlformats.org/drawingml/2006/main" xmlns:r="http://schemas.openxmlformats.org/officeDocument/2006/relationships" xmlns:p="http://schemas.openxmlformats.org/presentationml/2006/main">
   <p:cSld>
     <p:spTree>
@@ -4403,7 +4578,7 @@
 </p:sld>
 </file>
 
-<file path=ppt/slides/slide7.xml><?xml version="1.0" encoding="utf-8"?>
+<file path=ppt/slides/slide8.xml><?xml version="1.0" encoding="utf-8"?>
 <p:sld xmlns:a="http://schemas.openxmlformats.org/drawingml/2006/main" xmlns:r="http://schemas.openxmlformats.org/officeDocument/2006/relationships" xmlns:p="http://schemas.openxmlformats.org/presentationml/2006/main">
   <p:cSld>
     <p:spTree>
@@ -4502,7 +4677,7 @@
 </p:sld>
 </file>
 
-<file path=ppt/slides/slide8.xml><?xml version="1.0" encoding="utf-8"?>
+<file path=ppt/slides/slide9.xml><?xml version="1.0" encoding="utf-8"?>
 <p:sld xmlns:a="http://schemas.openxmlformats.org/drawingml/2006/main" xmlns:r="http://schemas.openxmlformats.org/officeDocument/2006/relationships" xmlns:p="http://schemas.openxmlformats.org/presentationml/2006/main">
   <p:cSld>
     <p:spTree>
@@ -4575,96 +4750,6 @@
     <p:extLst>
       <p:ext uri="{BB962C8B-B14F-4D97-AF65-F5344CB8AC3E}">
         <p14:creationId xmlns:p14="http://schemas.microsoft.com/office/powerpoint/2010/main" val="3615759369"/>
-      </p:ext>
-    </p:extLst>
-  </p:cSld>
-  <p:clrMapOvr>
-    <a:masterClrMapping/>
-  </p:clrMapOvr>
-</p:sld>
-</file>
-
-<file path=ppt/slides/slide9.xml><?xml version="1.0" encoding="utf-8"?>
-<p:sld xmlns:a="http://schemas.openxmlformats.org/drawingml/2006/main" xmlns:r="http://schemas.openxmlformats.org/officeDocument/2006/relationships" xmlns:p="http://schemas.openxmlformats.org/presentationml/2006/main">
-  <p:cSld>
-    <p:spTree>
-      <p:nvGrpSpPr>
-        <p:cNvPr id="1" name=""/>
-        <p:cNvGrpSpPr/>
-        <p:nvPr/>
-      </p:nvGrpSpPr>
-      <p:grpSpPr>
-        <a:xfrm>
-          <a:off x="0" y="0"/>
-          <a:ext cx="0" cy="0"/>
-          <a:chOff x="0" y="0"/>
-          <a:chExt cx="0" cy="0"/>
-        </a:xfrm>
-      </p:grpSpPr>
-      <p:sp>
-        <p:nvSpPr>
-          <p:cNvPr id="2" name="Title 1"/>
-          <p:cNvSpPr>
-            <a:spLocks noGrp="1"/>
-          </p:cNvSpPr>
-          <p:nvPr>
-            <p:ph type="title"/>
-          </p:nvPr>
-        </p:nvSpPr>
-        <p:spPr/>
-        <p:txBody>
-          <a:bodyPr/>
-          <a:lstStyle/>
-          <a:p>
-            <a:r>
-              <a:rPr lang="en-US" dirty="0" smtClean="0"/>
-              <a:t>Added README.md to </a:t>
-            </a:r>
-            <a:r>
-              <a:rPr lang="en-US" dirty="0" err="1" smtClean="0"/>
-              <a:t>Git</a:t>
-            </a:r>
-            <a:r>
-              <a:rPr lang="en-US" dirty="0" smtClean="0"/>
-              <a:t> repo</a:t>
-            </a:r>
-            <a:endParaRPr lang="en-US" dirty="0"/>
-          </a:p>
-        </p:txBody>
-      </p:sp>
-      <p:pic>
-        <p:nvPicPr>
-          <p:cNvPr id="4" name="Content Placeholder 3"/>
-          <p:cNvPicPr>
-            <a:picLocks noGrp="1" noChangeAspect="1"/>
-          </p:cNvPicPr>
-          <p:nvPr>
-            <p:ph idx="1"/>
-          </p:nvPr>
-        </p:nvPicPr>
-        <p:blipFill>
-          <a:blip r:embed="rId2" cstate="print">
-            <a:extLst>
-              <a:ext uri="{28A0092B-C50C-407E-A947-70E740481C1C}">
-                <a14:useLocalDpi xmlns:a14="http://schemas.microsoft.com/office/drawing/2010/main" val="0"/>
-              </a:ext>
-            </a:extLst>
-          </a:blip>
-          <a:stretch>
-            <a:fillRect/>
-          </a:stretch>
-        </p:blipFill>
-        <p:spPr>
-          <a:xfrm>
-            <a:off x="2228144" y="1825625"/>
-            <a:ext cx="7735712" cy="4351338"/>
-          </a:xfrm>
-        </p:spPr>
-      </p:pic>
-    </p:spTree>
-    <p:extLst>
-      <p:ext uri="{BB962C8B-B14F-4D97-AF65-F5344CB8AC3E}">
-        <p14:creationId xmlns:p14="http://schemas.microsoft.com/office/powerpoint/2010/main" val="2766168490"/>
       </p:ext>
     </p:extLst>
   </p:cSld>
